--- a/Presentation.pptx
+++ b/Presentation.pptx
@@ -8,29 +8,31 @@
     <p:sldId id="256" r:id="rId2"/>
     <p:sldId id="257" r:id="rId3"/>
     <p:sldId id="260" r:id="rId4"/>
-    <p:sldId id="259" r:id="rId5"/>
-    <p:sldId id="278" r:id="rId6"/>
-    <p:sldId id="277" r:id="rId7"/>
-    <p:sldId id="261" r:id="rId8"/>
-    <p:sldId id="262" r:id="rId9"/>
-    <p:sldId id="263" r:id="rId10"/>
-    <p:sldId id="264" r:id="rId11"/>
-    <p:sldId id="279" r:id="rId12"/>
-    <p:sldId id="280" r:id="rId13"/>
-    <p:sldId id="265" r:id="rId14"/>
-    <p:sldId id="266" r:id="rId15"/>
-    <p:sldId id="267" r:id="rId16"/>
-    <p:sldId id="268" r:id="rId17"/>
-    <p:sldId id="269" r:id="rId18"/>
-    <p:sldId id="281" r:id="rId19"/>
-    <p:sldId id="282" r:id="rId20"/>
-    <p:sldId id="270" r:id="rId21"/>
-    <p:sldId id="271" r:id="rId22"/>
-    <p:sldId id="273" r:id="rId23"/>
-    <p:sldId id="272" r:id="rId24"/>
-    <p:sldId id="274" r:id="rId25"/>
-    <p:sldId id="275" r:id="rId26"/>
-    <p:sldId id="276" r:id="rId27"/>
+    <p:sldId id="283" r:id="rId5"/>
+    <p:sldId id="284" r:id="rId6"/>
+    <p:sldId id="259" r:id="rId7"/>
+    <p:sldId id="278" r:id="rId8"/>
+    <p:sldId id="277" r:id="rId9"/>
+    <p:sldId id="261" r:id="rId10"/>
+    <p:sldId id="262" r:id="rId11"/>
+    <p:sldId id="263" r:id="rId12"/>
+    <p:sldId id="264" r:id="rId13"/>
+    <p:sldId id="279" r:id="rId14"/>
+    <p:sldId id="280" r:id="rId15"/>
+    <p:sldId id="265" r:id="rId16"/>
+    <p:sldId id="266" r:id="rId17"/>
+    <p:sldId id="267" r:id="rId18"/>
+    <p:sldId id="268" r:id="rId19"/>
+    <p:sldId id="269" r:id="rId20"/>
+    <p:sldId id="281" r:id="rId21"/>
+    <p:sldId id="282" r:id="rId22"/>
+    <p:sldId id="270" r:id="rId23"/>
+    <p:sldId id="271" r:id="rId24"/>
+    <p:sldId id="273" r:id="rId25"/>
+    <p:sldId id="272" r:id="rId26"/>
+    <p:sldId id="274" r:id="rId27"/>
+    <p:sldId id="275" r:id="rId28"/>
+    <p:sldId id="276" r:id="rId29"/>
   </p:sldIdLst>
   <p:sldSz cx="12192000" cy="6858000"/>
   <p:notesSz cx="6858000" cy="9144000"/>
@@ -143,7 +145,7 @@
     <p1510:client id="{7CE4585B-B9F1-393E-3D9D-A6EB62515CEC}" v="7" dt="2026-03-29T16:10:59.903"/>
     <p1510:client id="{A4CF2488-793A-4E7F-7915-688EB89A2EE2}" v="209" dt="2026-03-29T12:44:04.754"/>
     <p1510:client id="{C9036830-8FA7-D837-C5E9-9580186E49F7}" v="308" dt="2026-03-29T16:09:57.703"/>
-    <p1510:client id="{F9633879-8774-89D0-53B8-F95A3F735EB4}" v="535" dt="2026-03-29T17:56:18.850"/>
+    <p1510:client id="{F9633879-8774-89D0-53B8-F95A3F735EB4}" v="861" dt="2026-03-29T18:11:28.969"/>
   </p1510:revLst>
 </p1510:revInfo>
 </file>
@@ -3199,6 +3201,328 @@
         <p:cNvPr id="1" name="">
           <a:extLst>
             <a:ext uri="{FF2B5EF4-FFF2-40B4-BE49-F238E27FC236}">
+              <a16:creationId xmlns:a16="http://schemas.microsoft.com/office/drawing/2014/main" id="{3FC44ACF-5129-3431-3379-838A0413EF8F}"/>
+            </a:ext>
+          </a:extLst>
+        </p:cNvPr>
+        <p:cNvGrpSpPr/>
+        <p:nvPr/>
+      </p:nvGrpSpPr>
+      <p:grpSpPr>
+        <a:xfrm>
+          <a:off x="0" y="0"/>
+          <a:ext cx="0" cy="0"/>
+          <a:chOff x="0" y="0"/>
+          <a:chExt cx="0" cy="0"/>
+        </a:xfrm>
+      </p:grpSpPr>
+      <p:sp>
+        <p:nvSpPr>
+          <p:cNvPr id="2" name="Title 1">
+            <a:extLst>
+              <a:ext uri="{FF2B5EF4-FFF2-40B4-BE49-F238E27FC236}">
+                <a16:creationId xmlns:a16="http://schemas.microsoft.com/office/drawing/2014/main" id="{8572D0CF-7DBC-059B-6681-27195D13F06E}"/>
+              </a:ext>
+            </a:extLst>
+          </p:cNvPr>
+          <p:cNvSpPr>
+            <a:spLocks noGrp="1"/>
+          </p:cNvSpPr>
+          <p:nvPr>
+            <p:ph type="ctrTitle"/>
+          </p:nvPr>
+        </p:nvSpPr>
+        <p:spPr>
+          <a:xfrm>
+            <a:off x="1524000" y="216429"/>
+            <a:ext cx="9144000" cy="668867"/>
+          </a:xfrm>
+        </p:spPr>
+        <p:txBody>
+          <a:bodyPr>
+            <a:normAutofit/>
+          </a:bodyPr>
+          <a:lstStyle/>
+          <a:p>
+            <a:r>
+              <a:rPr lang="en-US" sz="4000">
+                <a:ea typeface="+mj-lt"/>
+                <a:cs typeface="+mj-lt"/>
+              </a:rPr>
+              <a:t>Parser</a:t>
+            </a:r>
+            <a:endParaRPr lang="en-US" sz="4000"/>
+          </a:p>
+        </p:txBody>
+      </p:sp>
+      <p:sp>
+        <p:nvSpPr>
+          <p:cNvPr id="3" name="Subtitle 2">
+            <a:extLst>
+              <a:ext uri="{FF2B5EF4-FFF2-40B4-BE49-F238E27FC236}">
+                <a16:creationId xmlns:a16="http://schemas.microsoft.com/office/drawing/2014/main" id="{02B69142-63DB-5493-8C1C-03A4C3378CEA}"/>
+              </a:ext>
+            </a:extLst>
+          </p:cNvPr>
+          <p:cNvSpPr>
+            <a:spLocks noGrp="1"/>
+          </p:cNvSpPr>
+          <p:nvPr>
+            <p:ph type="subTitle" idx="1"/>
+          </p:nvPr>
+        </p:nvSpPr>
+        <p:spPr>
+          <a:xfrm>
+            <a:off x="1254512" y="1019705"/>
+            <a:ext cx="9692268" cy="512762"/>
+          </a:xfrm>
+        </p:spPr>
+        <p:txBody>
+          <a:bodyPr vert="horz" lIns="91440" tIns="45720" rIns="91440" bIns="45720" rtlCol="0" anchor="t">
+            <a:noAutofit/>
+          </a:bodyPr>
+          <a:lstStyle/>
+          <a:p>
+            <a:r>
+              <a:rPr lang="en-US" sz="3000"/>
+              <a:t>Why it needs to read the file from the start for each header</a:t>
+            </a:r>
+          </a:p>
+          <a:p>
+            <a:endParaRPr lang="en-US" sz="3000" dirty="0"/>
+          </a:p>
+        </p:txBody>
+      </p:sp>
+      <p:sp>
+        <p:nvSpPr>
+          <p:cNvPr id="4" name="TextBox 3">
+            <a:extLst>
+              <a:ext uri="{FF2B5EF4-FFF2-40B4-BE49-F238E27FC236}">
+                <a16:creationId xmlns:a16="http://schemas.microsoft.com/office/drawing/2014/main" id="{30B55B87-252D-197D-DCDE-B1292264ACCD}"/>
+              </a:ext>
+            </a:extLst>
+          </p:cNvPr>
+          <p:cNvSpPr txBox="1"/>
+          <p:nvPr/>
+        </p:nvSpPr>
+        <p:spPr>
+          <a:xfrm>
+            <a:off x="726068" y="2055746"/>
+            <a:ext cx="10745231" cy="1477328"/>
+          </a:xfrm>
+          <a:prstGeom prst="rect">
+            <a:avLst/>
+          </a:prstGeom>
+          <a:noFill/>
+        </p:spPr>
+        <p:txBody>
+          <a:bodyPr rot="0" spcFirstLastPara="0" vertOverflow="overflow" horzOverflow="overflow" vert="horz" wrap="square" lIns="91440" tIns="45720" rIns="91440" bIns="45720" numCol="1" spcCol="0" rtlCol="0" fromWordArt="0" anchor="t" anchorCtr="0" forceAA="0" compatLnSpc="1">
+            <a:prstTxWarp prst="textNoShape">
+              <a:avLst/>
+            </a:prstTxWarp>
+            <a:spAutoFit/>
+          </a:bodyPr>
+          <a:lstStyle/>
+          <a:p>
+            <a:r>
+              <a:rPr lang="en-US" dirty="0">
+                <a:ea typeface="+mn-lt"/>
+                <a:cs typeface="+mn-lt"/>
+              </a:rPr>
+              <a:t>Due to some irregularities in the dataset file (e.g. An '#' between Submissions and Reviewers) and some doubts about the .csv structure (e.g. Can the topics have a different order), led us to make the decision to create the most generic parser to avoid problems in the future.</a:t>
+            </a:r>
+            <a:endParaRPr lang="en-US" dirty="0"/>
+          </a:p>
+          <a:p>
+            <a:endParaRPr lang="en-US" dirty="0"/>
+          </a:p>
+          <a:p>
+            <a:pPr algn="l"/>
+            <a:endParaRPr lang="en-US" dirty="0"/>
+          </a:p>
+        </p:txBody>
+      </p:sp>
+    </p:spTree>
+    <p:extLst>
+      <p:ext uri="{BB962C8B-B14F-4D97-AF65-F5344CB8AC3E}">
+        <p14:creationId xmlns:p14="http://schemas.microsoft.com/office/powerpoint/2010/main" val="1781105893"/>
+      </p:ext>
+    </p:extLst>
+  </p:cSld>
+  <p:clrMapOvr>
+    <a:masterClrMapping/>
+  </p:clrMapOvr>
+</p:sld>
+</file>
+
+<file path=ppt/slides/slide11.xml><?xml version="1.0" encoding="utf-8"?>
+<p:sld xmlns:a="http://schemas.openxmlformats.org/drawingml/2006/main" xmlns:r="http://schemas.openxmlformats.org/officeDocument/2006/relationships" xmlns:p="http://schemas.openxmlformats.org/presentationml/2006/main">
+  <p:cSld>
+    <p:spTree>
+      <p:nvGrpSpPr>
+        <p:cNvPr id="1" name="">
+          <a:extLst>
+            <a:ext uri="{FF2B5EF4-FFF2-40B4-BE49-F238E27FC236}">
+              <a16:creationId xmlns:a16="http://schemas.microsoft.com/office/drawing/2014/main" id="{79EC3670-619A-97DC-6C2B-272EBC8D1FF0}"/>
+            </a:ext>
+          </a:extLst>
+        </p:cNvPr>
+        <p:cNvGrpSpPr/>
+        <p:nvPr/>
+      </p:nvGrpSpPr>
+      <p:grpSpPr>
+        <a:xfrm>
+          <a:off x="0" y="0"/>
+          <a:ext cx="0" cy="0"/>
+          <a:chOff x="0" y="0"/>
+          <a:chExt cx="0" cy="0"/>
+        </a:xfrm>
+      </p:grpSpPr>
+      <p:sp>
+        <p:nvSpPr>
+          <p:cNvPr id="2" name="Title 1">
+            <a:extLst>
+              <a:ext uri="{FF2B5EF4-FFF2-40B4-BE49-F238E27FC236}">
+                <a16:creationId xmlns:a16="http://schemas.microsoft.com/office/drawing/2014/main" id="{660E874B-561E-2F3B-3540-72184106D3B6}"/>
+              </a:ext>
+            </a:extLst>
+          </p:cNvPr>
+          <p:cNvSpPr>
+            <a:spLocks noGrp="1"/>
+          </p:cNvSpPr>
+          <p:nvPr>
+            <p:ph type="ctrTitle"/>
+          </p:nvPr>
+        </p:nvSpPr>
+        <p:spPr>
+          <a:xfrm>
+            <a:off x="1524000" y="216429"/>
+            <a:ext cx="9144000" cy="668867"/>
+          </a:xfrm>
+        </p:spPr>
+        <p:txBody>
+          <a:bodyPr>
+            <a:normAutofit/>
+          </a:bodyPr>
+          <a:lstStyle/>
+          <a:p>
+            <a:r>
+              <a:rPr lang="en-US" sz="4000">
+                <a:ea typeface="+mj-lt"/>
+                <a:cs typeface="+mj-lt"/>
+              </a:rPr>
+              <a:t>Parser</a:t>
+            </a:r>
+            <a:endParaRPr lang="en-US" sz="4000"/>
+          </a:p>
+        </p:txBody>
+      </p:sp>
+      <p:sp>
+        <p:nvSpPr>
+          <p:cNvPr id="3" name="Subtitle 2">
+            <a:extLst>
+              <a:ext uri="{FF2B5EF4-FFF2-40B4-BE49-F238E27FC236}">
+                <a16:creationId xmlns:a16="http://schemas.microsoft.com/office/drawing/2014/main" id="{81664839-6FA2-A523-BBD1-E881B2C474FA}"/>
+              </a:ext>
+            </a:extLst>
+          </p:cNvPr>
+          <p:cNvSpPr>
+            <a:spLocks noGrp="1"/>
+          </p:cNvSpPr>
+          <p:nvPr>
+            <p:ph type="subTitle" idx="1"/>
+          </p:nvPr>
+        </p:nvSpPr>
+        <p:spPr>
+          <a:xfrm>
+            <a:off x="1254512" y="1019705"/>
+            <a:ext cx="9692268" cy="512762"/>
+          </a:xfrm>
+        </p:spPr>
+        <p:txBody>
+          <a:bodyPr vert="horz" lIns="91440" tIns="45720" rIns="91440" bIns="45720" rtlCol="0" anchor="t">
+            <a:noAutofit/>
+          </a:bodyPr>
+          <a:lstStyle/>
+          <a:p>
+            <a:r>
+              <a:rPr lang="en-US" sz="3000"/>
+              <a:t>Time complexity</a:t>
+            </a:r>
+            <a:endParaRPr lang="en-US"/>
+          </a:p>
+        </p:txBody>
+      </p:sp>
+      <p:sp>
+        <p:nvSpPr>
+          <p:cNvPr id="4" name="TextBox 3">
+            <a:extLst>
+              <a:ext uri="{FF2B5EF4-FFF2-40B4-BE49-F238E27FC236}">
+                <a16:creationId xmlns:a16="http://schemas.microsoft.com/office/drawing/2014/main" id="{9A0E3988-416C-A0E5-6E47-8D3E1C72D2FE}"/>
+              </a:ext>
+            </a:extLst>
+          </p:cNvPr>
+          <p:cNvSpPr txBox="1"/>
+          <p:nvPr/>
+        </p:nvSpPr>
+        <p:spPr>
+          <a:xfrm>
+            <a:off x="726068" y="2055746"/>
+            <a:ext cx="10745231" cy="1200329"/>
+          </a:xfrm>
+          <a:prstGeom prst="rect">
+            <a:avLst/>
+          </a:prstGeom>
+          <a:noFill/>
+        </p:spPr>
+        <p:txBody>
+          <a:bodyPr rot="0" spcFirstLastPara="0" vertOverflow="overflow" horzOverflow="overflow" vert="horz" wrap="square" lIns="91440" tIns="45720" rIns="91440" bIns="45720" numCol="1" spcCol="0" rtlCol="0" fromWordArt="0" anchor="t" anchorCtr="0" forceAA="0" compatLnSpc="1">
+            <a:prstTxWarp prst="textNoShape">
+              <a:avLst/>
+            </a:prstTxWarp>
+            <a:spAutoFit/>
+          </a:bodyPr>
+          <a:lstStyle/>
+          <a:p>
+            <a:r>
+              <a:rPr lang="en-US" dirty="0">
+                <a:ea typeface="+mn-lt"/>
+                <a:cs typeface="+mn-lt"/>
+              </a:rPr>
+              <a:t>Let l be the number of lines and h be the number of headers, the upper bound can be defined to be O(l * h). So in this project, the time complexity to parse the dataset is O(4 * l) = O(l)</a:t>
+            </a:r>
+            <a:endParaRPr lang="en-US" dirty="0"/>
+          </a:p>
+          <a:p>
+            <a:endParaRPr lang="en-US" dirty="0"/>
+          </a:p>
+          <a:p>
+            <a:pPr algn="l"/>
+            <a:endParaRPr lang="en-US" dirty="0"/>
+          </a:p>
+        </p:txBody>
+      </p:sp>
+    </p:spTree>
+    <p:extLst>
+      <p:ext uri="{BB962C8B-B14F-4D97-AF65-F5344CB8AC3E}">
+        <p14:creationId xmlns:p14="http://schemas.microsoft.com/office/powerpoint/2010/main" val="3670456106"/>
+      </p:ext>
+    </p:extLst>
+  </p:cSld>
+  <p:clrMapOvr>
+    <a:masterClrMapping/>
+  </p:clrMapOvr>
+</p:sld>
+</file>
+
+<file path=ppt/slides/slide12.xml><?xml version="1.0" encoding="utf-8"?>
+<p:sld xmlns:a="http://schemas.openxmlformats.org/drawingml/2006/main" xmlns:r="http://schemas.openxmlformats.org/officeDocument/2006/relationships" xmlns:p="http://schemas.openxmlformats.org/presentationml/2006/main">
+  <p:cSld>
+    <p:spTree>
+      <p:nvGrpSpPr>
+        <p:cNvPr id="1" name="">
+          <a:extLst>
+            <a:ext uri="{FF2B5EF4-FFF2-40B4-BE49-F238E27FC236}">
               <a16:creationId xmlns:a16="http://schemas.microsoft.com/office/drawing/2014/main" id="{504EB92A-437E-D041-1EB6-8F953C16561E}"/>
             </a:ext>
           </a:extLst>
@@ -3376,7 +3700,7 @@
 </p:sld>
 </file>
 
-<file path=ppt/slides/slide11.xml><?xml version="1.0" encoding="utf-8"?>
+<file path=ppt/slides/slide13.xml><?xml version="1.0" encoding="utf-8"?>
 <p:sld xmlns:a="http://schemas.openxmlformats.org/drawingml/2006/main" xmlns:r="http://schemas.openxmlformats.org/officeDocument/2006/relationships" xmlns:p="http://schemas.openxmlformats.org/presentationml/2006/main">
   <p:cSld>
     <p:spTree>
@@ -3609,7 +3933,7 @@
 </p:sld>
 </file>
 
-<file path=ppt/slides/slide12.xml><?xml version="1.0" encoding="utf-8"?>
+<file path=ppt/slides/slide14.xml><?xml version="1.0" encoding="utf-8"?>
 <p:sld xmlns:a="http://schemas.openxmlformats.org/drawingml/2006/main" xmlns:r="http://schemas.openxmlformats.org/officeDocument/2006/relationships" xmlns:p="http://schemas.openxmlformats.org/presentationml/2006/main">
   <p:cSld>
     <p:spTree>
@@ -3813,7 +4137,7 @@
 </p:sld>
 </file>
 
-<file path=ppt/slides/slide13.xml><?xml version="1.0" encoding="utf-8"?>
+<file path=ppt/slides/slide15.xml><?xml version="1.0" encoding="utf-8"?>
 <p:sld xmlns:a="http://schemas.openxmlformats.org/drawingml/2006/main" xmlns:r="http://schemas.openxmlformats.org/officeDocument/2006/relationships" xmlns:p="http://schemas.openxmlformats.org/presentationml/2006/main">
   <p:cSld>
     <p:spTree>
@@ -4028,7 +4352,7 @@
 </p:sld>
 </file>
 
-<file path=ppt/slides/slide14.xml><?xml version="1.0" encoding="utf-8"?>
+<file path=ppt/slides/slide16.xml><?xml version="1.0" encoding="utf-8"?>
 <p:sld xmlns:a="http://schemas.openxmlformats.org/drawingml/2006/main" xmlns:r="http://schemas.openxmlformats.org/officeDocument/2006/relationships" xmlns:p="http://schemas.openxmlformats.org/presentationml/2006/main">
   <p:cSld>
     <p:spTree>
@@ -4207,7 +4531,7 @@
 </p:sld>
 </file>
 
-<file path=ppt/slides/slide15.xml><?xml version="1.0" encoding="utf-8"?>
+<file path=ppt/slides/slide17.xml><?xml version="1.0" encoding="utf-8"?>
 <p:sld xmlns:a="http://schemas.openxmlformats.org/drawingml/2006/main" xmlns:r="http://schemas.openxmlformats.org/officeDocument/2006/relationships" xmlns:p="http://schemas.openxmlformats.org/presentationml/2006/main">
   <p:cSld>
     <p:spTree>
@@ -4385,7 +4709,7 @@
 </p:sld>
 </file>
 
-<file path=ppt/slides/slide16.xml><?xml version="1.0" encoding="utf-8"?>
+<file path=ppt/slides/slide18.xml><?xml version="1.0" encoding="utf-8"?>
 <p:sld xmlns:a="http://schemas.openxmlformats.org/drawingml/2006/main" xmlns:r="http://schemas.openxmlformats.org/officeDocument/2006/relationships" xmlns:p="http://schemas.openxmlformats.org/presentationml/2006/main">
   <p:cSld>
     <p:spTree>
@@ -4562,7 +4886,7 @@
 </p:sld>
 </file>
 
-<file path=ppt/slides/slide17.xml><?xml version="1.0" encoding="utf-8"?>
+<file path=ppt/slides/slide19.xml><?xml version="1.0" encoding="utf-8"?>
 <p:sld xmlns:a="http://schemas.openxmlformats.org/drawingml/2006/main" xmlns:r="http://schemas.openxmlformats.org/officeDocument/2006/relationships" xmlns:p="http://schemas.openxmlformats.org/presentationml/2006/main">
   <p:cSld>
     <p:spTree>
@@ -4714,481 +5038,6 @@
     <p:extLst>
       <p:ext uri="{BB962C8B-B14F-4D97-AF65-F5344CB8AC3E}">
         <p14:creationId xmlns:p14="http://schemas.microsoft.com/office/powerpoint/2010/main" val="2014364231"/>
-      </p:ext>
-    </p:extLst>
-  </p:cSld>
-  <p:clrMapOvr>
-    <a:masterClrMapping/>
-  </p:clrMapOvr>
-</p:sld>
-</file>
-
-<file path=ppt/slides/slide18.xml><?xml version="1.0" encoding="utf-8"?>
-<p:sld xmlns:a="http://schemas.openxmlformats.org/drawingml/2006/main" xmlns:r="http://schemas.openxmlformats.org/officeDocument/2006/relationships" xmlns:p="http://schemas.openxmlformats.org/presentationml/2006/main">
-  <p:cSld>
-    <p:spTree>
-      <p:nvGrpSpPr>
-        <p:cNvPr id="1" name="">
-          <a:extLst>
-            <a:ext uri="{FF2B5EF4-FFF2-40B4-BE49-F238E27FC236}">
-              <a16:creationId xmlns:a16="http://schemas.microsoft.com/office/drawing/2014/main" id="{58D9F8DB-99C0-44B4-5504-FD99FB7AE3F0}"/>
-            </a:ext>
-          </a:extLst>
-        </p:cNvPr>
-        <p:cNvGrpSpPr/>
-        <p:nvPr/>
-      </p:nvGrpSpPr>
-      <p:grpSpPr>
-        <a:xfrm>
-          <a:off x="0" y="0"/>
-          <a:ext cx="0" cy="0"/>
-          <a:chOff x="0" y="0"/>
-          <a:chExt cx="0" cy="0"/>
-        </a:xfrm>
-      </p:grpSpPr>
-      <p:sp>
-        <p:nvSpPr>
-          <p:cNvPr id="2" name="Title 1">
-            <a:extLst>
-              <a:ext uri="{FF2B5EF4-FFF2-40B4-BE49-F238E27FC236}">
-                <a16:creationId xmlns:a16="http://schemas.microsoft.com/office/drawing/2014/main" id="{876D2B4F-448F-3FDA-4D59-AF9BC070BC75}"/>
-              </a:ext>
-            </a:extLst>
-          </p:cNvPr>
-          <p:cNvSpPr>
-            <a:spLocks noGrp="1"/>
-          </p:cNvSpPr>
-          <p:nvPr>
-            <p:ph type="ctrTitle"/>
-          </p:nvPr>
-        </p:nvSpPr>
-        <p:spPr>
-          <a:xfrm>
-            <a:off x="1524000" y="216429"/>
-            <a:ext cx="9144000" cy="668867"/>
-          </a:xfrm>
-        </p:spPr>
-        <p:txBody>
-          <a:bodyPr>
-            <a:normAutofit/>
-          </a:bodyPr>
-          <a:lstStyle/>
-          <a:p>
-            <a:r>
-              <a:rPr lang="en-US" sz="4000">
-                <a:ea typeface="+mj-lt"/>
-                <a:cs typeface="+mj-lt"/>
-              </a:rPr>
-              <a:t>Tool</a:t>
-            </a:r>
-            <a:endParaRPr lang="en-US"/>
-          </a:p>
-        </p:txBody>
-      </p:sp>
-      <p:sp>
-        <p:nvSpPr>
-          <p:cNvPr id="3" name="Subtitle 2">
-            <a:extLst>
-              <a:ext uri="{FF2B5EF4-FFF2-40B4-BE49-F238E27FC236}">
-                <a16:creationId xmlns:a16="http://schemas.microsoft.com/office/drawing/2014/main" id="{9E95707F-54CB-D00D-917D-4BC100491E0E}"/>
-              </a:ext>
-            </a:extLst>
-          </p:cNvPr>
-          <p:cNvSpPr>
-            <a:spLocks noGrp="1"/>
-          </p:cNvSpPr>
-          <p:nvPr>
-            <p:ph type="subTitle" idx="1"/>
-          </p:nvPr>
-        </p:nvSpPr>
-        <p:spPr>
-          <a:xfrm>
-            <a:off x="1524000" y="1019705"/>
-            <a:ext cx="9144000" cy="512762"/>
-          </a:xfrm>
-        </p:spPr>
-        <p:txBody>
-          <a:bodyPr vert="horz" lIns="91440" tIns="45720" rIns="91440" bIns="45720" rtlCol="0" anchor="t">
-            <a:normAutofit/>
-          </a:bodyPr>
-          <a:lstStyle/>
-          <a:p>
-            <a:r>
-              <a:rPr lang="en-US" sz="3000"/>
-              <a:t>How it works</a:t>
-            </a:r>
-          </a:p>
-        </p:txBody>
-      </p:sp>
-      <p:sp>
-        <p:nvSpPr>
-          <p:cNvPr id="4" name="TextBox 3">
-            <a:extLst>
-              <a:ext uri="{FF2B5EF4-FFF2-40B4-BE49-F238E27FC236}">
-                <a16:creationId xmlns:a16="http://schemas.microsoft.com/office/drawing/2014/main" id="{C808BD39-460E-4EB4-DDD1-4BB6E753FD83}"/>
-              </a:ext>
-            </a:extLst>
-          </p:cNvPr>
-          <p:cNvSpPr txBox="1"/>
-          <p:nvPr/>
-        </p:nvSpPr>
-        <p:spPr>
-          <a:xfrm>
-            <a:off x="726068" y="2055746"/>
-            <a:ext cx="6163939" cy="2862322"/>
-          </a:xfrm>
-          <a:prstGeom prst="rect">
-            <a:avLst/>
-          </a:prstGeom>
-          <a:noFill/>
-        </p:spPr>
-        <p:txBody>
-          <a:bodyPr rot="0" spcFirstLastPara="0" vertOverflow="overflow" horzOverflow="overflow" vert="horz" wrap="square" lIns="91440" tIns="45720" rIns="91440" bIns="45720" numCol="1" spcCol="0" rtlCol="0" fromWordArt="0" anchor="t" anchorCtr="0" forceAA="0" compatLnSpc="1">
-            <a:prstTxWarp prst="textNoShape">
-              <a:avLst/>
-            </a:prstTxWarp>
-            <a:spAutoFit/>
-          </a:bodyPr>
-          <a:lstStyle/>
-          <a:p>
-            <a:r>
-              <a:rPr lang="en-US">
-                <a:ea typeface="+mn-lt"/>
-                <a:cs typeface="+mn-lt"/>
-              </a:rPr>
-              <a:t>The setup() function loads</a:t>
-            </a:r>
-            <a:r>
-              <a:rPr lang="en-US" dirty="0">
-                <a:ea typeface="+mn-lt"/>
-                <a:cs typeface="+mn-lt"/>
-              </a:rPr>
-              <a:t> the input file, parses its contents using the Parser, and converts the data into a </a:t>
-            </a:r>
-            <a:r>
-              <a:rPr lang="en-US">
-                <a:ea typeface="+mn-lt"/>
-                <a:cs typeface="+mn-lt"/>
-              </a:rPr>
-              <a:t>graph structure through an adapter.</a:t>
-            </a:r>
-          </a:p>
-          <a:p>
-            <a:r>
-              <a:rPr lang="en-US" dirty="0">
-                <a:ea typeface="+mn-lt"/>
-                <a:cs typeface="+mn-lt"/>
-              </a:rPr>
-              <a:t>The main processing step is performed by </a:t>
-            </a:r>
-            <a:r>
-              <a:rPr lang="en-US" dirty="0" err="1">
-                <a:ea typeface="+mn-lt"/>
-                <a:cs typeface="+mn-lt"/>
-              </a:rPr>
-              <a:t>get_max_flow</a:t>
-            </a:r>
-            <a:r>
-              <a:rPr lang="en-US" dirty="0">
-                <a:ea typeface="+mn-lt"/>
-                <a:cs typeface="+mn-lt"/>
-              </a:rPr>
-              <a:t>(), which applies the Edmonds-Karp algorithm to compute a maximum flow on the graph. This corresponds to finding an optimal assignment between reviewers and submissions. The resulting flow is then interpreted and stored as matching outputs for both submissions and reviewers.</a:t>
-            </a:r>
-            <a:endParaRPr lang="en-US"/>
-          </a:p>
-          <a:p>
-            <a:endParaRPr lang="en-US" dirty="0"/>
-          </a:p>
-        </p:txBody>
-      </p:sp>
-      <p:pic>
-        <p:nvPicPr>
-          <p:cNvPr id="5" name="Picture 4" descr="A screen shot of a computer program&#10;&#10;AI-generated content may be incorrect.">
-            <a:extLst>
-              <a:ext uri="{FF2B5EF4-FFF2-40B4-BE49-F238E27FC236}">
-                <a16:creationId xmlns:a16="http://schemas.microsoft.com/office/drawing/2014/main" id="{C907397F-BE70-8D54-6F9E-93DA3B67BC6F}"/>
-              </a:ext>
-            </a:extLst>
-          </p:cNvPr>
-          <p:cNvPicPr>
-            <a:picLocks noChangeAspect="1"/>
-          </p:cNvPicPr>
-          <p:nvPr/>
-        </p:nvPicPr>
-        <p:blipFill>
-          <a:blip r:embed="rId2"/>
-          <a:stretch>
-            <a:fillRect/>
-          </a:stretch>
-        </p:blipFill>
-        <p:spPr>
-          <a:xfrm>
-            <a:off x="7918876" y="2054380"/>
-            <a:ext cx="3305175" cy="1466850"/>
-          </a:xfrm>
-          <a:prstGeom prst="rect">
-            <a:avLst/>
-          </a:prstGeom>
-        </p:spPr>
-      </p:pic>
-      <p:pic>
-        <p:nvPicPr>
-          <p:cNvPr id="6" name="Picture 5" descr="A screen shot of a computer program&#10;&#10;AI-generated content may be incorrect.">
-            <a:extLst>
-              <a:ext uri="{FF2B5EF4-FFF2-40B4-BE49-F238E27FC236}">
-                <a16:creationId xmlns:a16="http://schemas.microsoft.com/office/drawing/2014/main" id="{5E235C50-1A77-7CD4-E1DF-6A12630F8015}"/>
-              </a:ext>
-            </a:extLst>
-          </p:cNvPr>
-          <p:cNvPicPr>
-            <a:picLocks noChangeAspect="1"/>
-          </p:cNvPicPr>
-          <p:nvPr/>
-        </p:nvPicPr>
-        <p:blipFill>
-          <a:blip r:embed="rId3"/>
-          <a:stretch>
-            <a:fillRect/>
-          </a:stretch>
-        </p:blipFill>
-        <p:spPr>
-          <a:xfrm>
-            <a:off x="6879373" y="4691411"/>
-            <a:ext cx="4343400" cy="1638300"/>
-          </a:xfrm>
-          <a:prstGeom prst="rect">
-            <a:avLst/>
-          </a:prstGeom>
-        </p:spPr>
-      </p:pic>
-    </p:spTree>
-    <p:extLst>
-      <p:ext uri="{BB962C8B-B14F-4D97-AF65-F5344CB8AC3E}">
-        <p14:creationId xmlns:p14="http://schemas.microsoft.com/office/powerpoint/2010/main" val="99838967"/>
-      </p:ext>
-    </p:extLst>
-  </p:cSld>
-  <p:clrMapOvr>
-    <a:masterClrMapping/>
-  </p:clrMapOvr>
-</p:sld>
-</file>
-
-<file path=ppt/slides/slide19.xml><?xml version="1.0" encoding="utf-8"?>
-<p:sld xmlns:a="http://schemas.openxmlformats.org/drawingml/2006/main" xmlns:r="http://schemas.openxmlformats.org/officeDocument/2006/relationships" xmlns:p="http://schemas.openxmlformats.org/presentationml/2006/main">
-  <p:cSld>
-    <p:spTree>
-      <p:nvGrpSpPr>
-        <p:cNvPr id="1" name="">
-          <a:extLst>
-            <a:ext uri="{FF2B5EF4-FFF2-40B4-BE49-F238E27FC236}">
-              <a16:creationId xmlns:a16="http://schemas.microsoft.com/office/drawing/2014/main" id="{998ACD8B-3FD3-6285-00F6-64C70CFEB211}"/>
-            </a:ext>
-          </a:extLst>
-        </p:cNvPr>
-        <p:cNvGrpSpPr/>
-        <p:nvPr/>
-      </p:nvGrpSpPr>
-      <p:grpSpPr>
-        <a:xfrm>
-          <a:off x="0" y="0"/>
-          <a:ext cx="0" cy="0"/>
-          <a:chOff x="0" y="0"/>
-          <a:chExt cx="0" cy="0"/>
-        </a:xfrm>
-      </p:grpSpPr>
-      <p:sp>
-        <p:nvSpPr>
-          <p:cNvPr id="2" name="Title 1">
-            <a:extLst>
-              <a:ext uri="{FF2B5EF4-FFF2-40B4-BE49-F238E27FC236}">
-                <a16:creationId xmlns:a16="http://schemas.microsoft.com/office/drawing/2014/main" id="{D5FDD2BD-9F6D-CFF1-39E2-E34A9A558FBA}"/>
-              </a:ext>
-            </a:extLst>
-          </p:cNvPr>
-          <p:cNvSpPr>
-            <a:spLocks noGrp="1"/>
-          </p:cNvSpPr>
-          <p:nvPr>
-            <p:ph type="ctrTitle"/>
-          </p:nvPr>
-        </p:nvSpPr>
-        <p:spPr>
-          <a:xfrm>
-            <a:off x="1524000" y="216429"/>
-            <a:ext cx="9144000" cy="668867"/>
-          </a:xfrm>
-        </p:spPr>
-        <p:txBody>
-          <a:bodyPr>
-            <a:normAutofit/>
-          </a:bodyPr>
-          <a:lstStyle/>
-          <a:p>
-            <a:r>
-              <a:rPr lang="en-US" sz="4000">
-                <a:ea typeface="+mj-lt"/>
-                <a:cs typeface="+mj-lt"/>
-              </a:rPr>
-              <a:t>Tool</a:t>
-            </a:r>
-            <a:endParaRPr lang="en-US"/>
-          </a:p>
-        </p:txBody>
-      </p:sp>
-      <p:sp>
-        <p:nvSpPr>
-          <p:cNvPr id="3" name="Subtitle 2">
-            <a:extLst>
-              <a:ext uri="{FF2B5EF4-FFF2-40B4-BE49-F238E27FC236}">
-                <a16:creationId xmlns:a16="http://schemas.microsoft.com/office/drawing/2014/main" id="{CD2246FA-A818-C9D3-813D-1103CA7A2C23}"/>
-              </a:ext>
-            </a:extLst>
-          </p:cNvPr>
-          <p:cNvSpPr>
-            <a:spLocks noGrp="1"/>
-          </p:cNvSpPr>
-          <p:nvPr>
-            <p:ph type="subTitle" idx="1"/>
-          </p:nvPr>
-        </p:nvSpPr>
-        <p:spPr>
-          <a:xfrm>
-            <a:off x="1524000" y="1019705"/>
-            <a:ext cx="9144000" cy="512762"/>
-          </a:xfrm>
-        </p:spPr>
-        <p:txBody>
-          <a:bodyPr vert="horz" lIns="91440" tIns="45720" rIns="91440" bIns="45720" rtlCol="0" anchor="t">
-            <a:normAutofit/>
-          </a:bodyPr>
-          <a:lstStyle/>
-          <a:p>
-            <a:r>
-              <a:rPr lang="en-US" sz="3000"/>
-              <a:t>How it works</a:t>
-            </a:r>
-          </a:p>
-        </p:txBody>
-      </p:sp>
-      <p:sp>
-        <p:nvSpPr>
-          <p:cNvPr id="4" name="TextBox 3">
-            <a:extLst>
-              <a:ext uri="{FF2B5EF4-FFF2-40B4-BE49-F238E27FC236}">
-                <a16:creationId xmlns:a16="http://schemas.microsoft.com/office/drawing/2014/main" id="{931AB3C5-2BA1-5870-A383-C725ABF49094}"/>
-              </a:ext>
-            </a:extLst>
-          </p:cNvPr>
-          <p:cNvSpPr txBox="1"/>
-          <p:nvPr/>
-        </p:nvSpPr>
-        <p:spPr>
-          <a:xfrm>
-            <a:off x="726068" y="2055746"/>
-            <a:ext cx="10735939" cy="3416320"/>
-          </a:xfrm>
-          <a:prstGeom prst="rect">
-            <a:avLst/>
-          </a:prstGeom>
-          <a:noFill/>
-        </p:spPr>
-        <p:txBody>
-          <a:bodyPr rot="0" spcFirstLastPara="0" vertOverflow="overflow" horzOverflow="overflow" vert="horz" wrap="square" lIns="91440" tIns="45720" rIns="91440" bIns="45720" numCol="1" spcCol="0" rtlCol="0" fromWordArt="0" anchor="t" anchorCtr="0" forceAA="0" compatLnSpc="1">
-            <a:prstTxWarp prst="textNoShape">
-              <a:avLst/>
-            </a:prstTxWarp>
-            <a:spAutoFit/>
-          </a:bodyPr>
-          <a:lstStyle/>
-          <a:p>
-            <a:r>
-              <a:rPr lang="en-US" dirty="0">
-                <a:ea typeface="+mn-lt"/>
-                <a:cs typeface="+mn-lt"/>
-              </a:rPr>
-              <a:t>The </a:t>
-            </a:r>
-            <a:r>
-              <a:rPr lang="en-US" dirty="0" err="1">
-                <a:ea typeface="+mn-lt"/>
-                <a:cs typeface="+mn-lt"/>
-              </a:rPr>
-              <a:t>risk_analysis</a:t>
-            </a:r>
-            <a:r>
-              <a:rPr lang="en-US" dirty="0">
-                <a:ea typeface="+mn-lt"/>
-                <a:cs typeface="+mn-lt"/>
-              </a:rPr>
-              <a:t>() function identifies critical reviewers whose removal would compromise the assignment. It performs a breadth-first search on the residual graph to determine which vertices are not reachable and derives the set of critical reviewers from this structure. This is best described further, in the corresponding section. </a:t>
-            </a:r>
-            <a:endParaRPr lang="en-US" dirty="0"/>
-          </a:p>
-          <a:p>
-            <a:r>
-              <a:rPr lang="en-US" dirty="0">
-                <a:ea typeface="+mn-lt"/>
-                <a:cs typeface="+mn-lt"/>
-              </a:rPr>
-              <a:t>The </a:t>
-            </a:r>
-            <a:r>
-              <a:rPr lang="en-US" dirty="0" err="1">
-                <a:ea typeface="+mn-lt"/>
-                <a:cs typeface="+mn-lt"/>
-              </a:rPr>
-              <a:t>get_missing_output</a:t>
-            </a:r>
-            <a:r>
-              <a:rPr lang="en-US" dirty="0">
-                <a:ea typeface="+mn-lt"/>
-                <a:cs typeface="+mn-lt"/>
-              </a:rPr>
-              <a:t>() function identifies submissions that did not receive the required number of reviewers by inspecting edges whose flow does not meet their capacity. These are stored and sorted for reporting. </a:t>
-            </a:r>
-            <a:endParaRPr lang="en-US" dirty="0"/>
-          </a:p>
-          <a:p>
-            <a:r>
-              <a:rPr lang="en-US">
-                <a:ea typeface="+mn-lt"/>
-                <a:cs typeface="+mn-lt"/>
-              </a:rPr>
-              <a:t>The class supports printing results to the console or saving them to a file. Outputs include the </a:t>
-            </a:r>
-            <a:r>
-              <a:rPr lang="en-US" dirty="0">
-                <a:ea typeface="+mn-lt"/>
-                <a:cs typeface="+mn-lt"/>
-              </a:rPr>
-              <a:t>assignment results, missing assignments, and risk analysis.</a:t>
-            </a:r>
-            <a:endParaRPr lang="en-US"/>
-          </a:p>
-          <a:p>
-            <a:endParaRPr lang="en-US" dirty="0">
-              <a:ea typeface="+mn-lt"/>
-              <a:cs typeface="+mn-lt"/>
-            </a:endParaRPr>
-          </a:p>
-          <a:p>
-            <a:endParaRPr lang="en-US" dirty="0">
-              <a:ea typeface="+mn-lt"/>
-              <a:cs typeface="+mn-lt"/>
-            </a:endParaRPr>
-          </a:p>
-          <a:p>
-            <a:pPr algn="l"/>
-            <a:endParaRPr lang="en-US" dirty="0"/>
-          </a:p>
-        </p:txBody>
-      </p:sp>
-    </p:spTree>
-    <p:extLst>
-      <p:ext uri="{BB962C8B-B14F-4D97-AF65-F5344CB8AC3E}">
-        <p14:creationId xmlns:p14="http://schemas.microsoft.com/office/powerpoint/2010/main" val="832998071"/>
       </p:ext>
     </p:extLst>
   </p:cSld>
@@ -5472,6 +5321,481 @@
         <p:cNvPr id="1" name="">
           <a:extLst>
             <a:ext uri="{FF2B5EF4-FFF2-40B4-BE49-F238E27FC236}">
+              <a16:creationId xmlns:a16="http://schemas.microsoft.com/office/drawing/2014/main" id="{58D9F8DB-99C0-44B4-5504-FD99FB7AE3F0}"/>
+            </a:ext>
+          </a:extLst>
+        </p:cNvPr>
+        <p:cNvGrpSpPr/>
+        <p:nvPr/>
+      </p:nvGrpSpPr>
+      <p:grpSpPr>
+        <a:xfrm>
+          <a:off x="0" y="0"/>
+          <a:ext cx="0" cy="0"/>
+          <a:chOff x="0" y="0"/>
+          <a:chExt cx="0" cy="0"/>
+        </a:xfrm>
+      </p:grpSpPr>
+      <p:sp>
+        <p:nvSpPr>
+          <p:cNvPr id="2" name="Title 1">
+            <a:extLst>
+              <a:ext uri="{FF2B5EF4-FFF2-40B4-BE49-F238E27FC236}">
+                <a16:creationId xmlns:a16="http://schemas.microsoft.com/office/drawing/2014/main" id="{876D2B4F-448F-3FDA-4D59-AF9BC070BC75}"/>
+              </a:ext>
+            </a:extLst>
+          </p:cNvPr>
+          <p:cNvSpPr>
+            <a:spLocks noGrp="1"/>
+          </p:cNvSpPr>
+          <p:nvPr>
+            <p:ph type="ctrTitle"/>
+          </p:nvPr>
+        </p:nvSpPr>
+        <p:spPr>
+          <a:xfrm>
+            <a:off x="1524000" y="216429"/>
+            <a:ext cx="9144000" cy="668867"/>
+          </a:xfrm>
+        </p:spPr>
+        <p:txBody>
+          <a:bodyPr>
+            <a:normAutofit/>
+          </a:bodyPr>
+          <a:lstStyle/>
+          <a:p>
+            <a:r>
+              <a:rPr lang="en-US" sz="4000">
+                <a:ea typeface="+mj-lt"/>
+                <a:cs typeface="+mj-lt"/>
+              </a:rPr>
+              <a:t>Tool</a:t>
+            </a:r>
+            <a:endParaRPr lang="en-US"/>
+          </a:p>
+        </p:txBody>
+      </p:sp>
+      <p:sp>
+        <p:nvSpPr>
+          <p:cNvPr id="3" name="Subtitle 2">
+            <a:extLst>
+              <a:ext uri="{FF2B5EF4-FFF2-40B4-BE49-F238E27FC236}">
+                <a16:creationId xmlns:a16="http://schemas.microsoft.com/office/drawing/2014/main" id="{9E95707F-54CB-D00D-917D-4BC100491E0E}"/>
+              </a:ext>
+            </a:extLst>
+          </p:cNvPr>
+          <p:cNvSpPr>
+            <a:spLocks noGrp="1"/>
+          </p:cNvSpPr>
+          <p:nvPr>
+            <p:ph type="subTitle" idx="1"/>
+          </p:nvPr>
+        </p:nvSpPr>
+        <p:spPr>
+          <a:xfrm>
+            <a:off x="1524000" y="1019705"/>
+            <a:ext cx="9144000" cy="512762"/>
+          </a:xfrm>
+        </p:spPr>
+        <p:txBody>
+          <a:bodyPr vert="horz" lIns="91440" tIns="45720" rIns="91440" bIns="45720" rtlCol="0" anchor="t">
+            <a:normAutofit/>
+          </a:bodyPr>
+          <a:lstStyle/>
+          <a:p>
+            <a:r>
+              <a:rPr lang="en-US" sz="3000"/>
+              <a:t>How it works</a:t>
+            </a:r>
+          </a:p>
+        </p:txBody>
+      </p:sp>
+      <p:sp>
+        <p:nvSpPr>
+          <p:cNvPr id="4" name="TextBox 3">
+            <a:extLst>
+              <a:ext uri="{FF2B5EF4-FFF2-40B4-BE49-F238E27FC236}">
+                <a16:creationId xmlns:a16="http://schemas.microsoft.com/office/drawing/2014/main" id="{C808BD39-460E-4EB4-DDD1-4BB6E753FD83}"/>
+              </a:ext>
+            </a:extLst>
+          </p:cNvPr>
+          <p:cNvSpPr txBox="1"/>
+          <p:nvPr/>
+        </p:nvSpPr>
+        <p:spPr>
+          <a:xfrm>
+            <a:off x="726068" y="2055746"/>
+            <a:ext cx="6163939" cy="2862322"/>
+          </a:xfrm>
+          <a:prstGeom prst="rect">
+            <a:avLst/>
+          </a:prstGeom>
+          <a:noFill/>
+        </p:spPr>
+        <p:txBody>
+          <a:bodyPr rot="0" spcFirstLastPara="0" vertOverflow="overflow" horzOverflow="overflow" vert="horz" wrap="square" lIns="91440" tIns="45720" rIns="91440" bIns="45720" numCol="1" spcCol="0" rtlCol="0" fromWordArt="0" anchor="t" anchorCtr="0" forceAA="0" compatLnSpc="1">
+            <a:prstTxWarp prst="textNoShape">
+              <a:avLst/>
+            </a:prstTxWarp>
+            <a:spAutoFit/>
+          </a:bodyPr>
+          <a:lstStyle/>
+          <a:p>
+            <a:r>
+              <a:rPr lang="en-US">
+                <a:ea typeface="+mn-lt"/>
+                <a:cs typeface="+mn-lt"/>
+              </a:rPr>
+              <a:t>The setup() function loads</a:t>
+            </a:r>
+            <a:r>
+              <a:rPr lang="en-US" dirty="0">
+                <a:ea typeface="+mn-lt"/>
+                <a:cs typeface="+mn-lt"/>
+              </a:rPr>
+              <a:t> the input file, parses its contents using the Parser, and converts the data into a </a:t>
+            </a:r>
+            <a:r>
+              <a:rPr lang="en-US">
+                <a:ea typeface="+mn-lt"/>
+                <a:cs typeface="+mn-lt"/>
+              </a:rPr>
+              <a:t>graph structure through an adapter.</a:t>
+            </a:r>
+          </a:p>
+          <a:p>
+            <a:r>
+              <a:rPr lang="en-US" dirty="0">
+                <a:ea typeface="+mn-lt"/>
+                <a:cs typeface="+mn-lt"/>
+              </a:rPr>
+              <a:t>The main processing step is performed by </a:t>
+            </a:r>
+            <a:r>
+              <a:rPr lang="en-US" dirty="0" err="1">
+                <a:ea typeface="+mn-lt"/>
+                <a:cs typeface="+mn-lt"/>
+              </a:rPr>
+              <a:t>get_max_flow</a:t>
+            </a:r>
+            <a:r>
+              <a:rPr lang="en-US" dirty="0">
+                <a:ea typeface="+mn-lt"/>
+                <a:cs typeface="+mn-lt"/>
+              </a:rPr>
+              <a:t>(), which applies the Edmonds-Karp algorithm to compute a maximum flow on the graph. This corresponds to finding an optimal assignment between reviewers and submissions. The resulting flow is then interpreted and stored as matching outputs for both submissions and reviewers.</a:t>
+            </a:r>
+            <a:endParaRPr lang="en-US"/>
+          </a:p>
+          <a:p>
+            <a:endParaRPr lang="en-US" dirty="0"/>
+          </a:p>
+        </p:txBody>
+      </p:sp>
+      <p:pic>
+        <p:nvPicPr>
+          <p:cNvPr id="5" name="Picture 4" descr="A screen shot of a computer program&#10;&#10;AI-generated content may be incorrect.">
+            <a:extLst>
+              <a:ext uri="{FF2B5EF4-FFF2-40B4-BE49-F238E27FC236}">
+                <a16:creationId xmlns:a16="http://schemas.microsoft.com/office/drawing/2014/main" id="{C907397F-BE70-8D54-6F9E-93DA3B67BC6F}"/>
+              </a:ext>
+            </a:extLst>
+          </p:cNvPr>
+          <p:cNvPicPr>
+            <a:picLocks noChangeAspect="1"/>
+          </p:cNvPicPr>
+          <p:nvPr/>
+        </p:nvPicPr>
+        <p:blipFill>
+          <a:blip r:embed="rId2"/>
+          <a:stretch>
+            <a:fillRect/>
+          </a:stretch>
+        </p:blipFill>
+        <p:spPr>
+          <a:xfrm>
+            <a:off x="7918876" y="2054380"/>
+            <a:ext cx="3305175" cy="1466850"/>
+          </a:xfrm>
+          <a:prstGeom prst="rect">
+            <a:avLst/>
+          </a:prstGeom>
+        </p:spPr>
+      </p:pic>
+      <p:pic>
+        <p:nvPicPr>
+          <p:cNvPr id="6" name="Picture 5" descr="A screen shot of a computer program&#10;&#10;AI-generated content may be incorrect.">
+            <a:extLst>
+              <a:ext uri="{FF2B5EF4-FFF2-40B4-BE49-F238E27FC236}">
+                <a16:creationId xmlns:a16="http://schemas.microsoft.com/office/drawing/2014/main" id="{5E235C50-1A77-7CD4-E1DF-6A12630F8015}"/>
+              </a:ext>
+            </a:extLst>
+          </p:cNvPr>
+          <p:cNvPicPr>
+            <a:picLocks noChangeAspect="1"/>
+          </p:cNvPicPr>
+          <p:nvPr/>
+        </p:nvPicPr>
+        <p:blipFill>
+          <a:blip r:embed="rId3"/>
+          <a:stretch>
+            <a:fillRect/>
+          </a:stretch>
+        </p:blipFill>
+        <p:spPr>
+          <a:xfrm>
+            <a:off x="6879373" y="4691411"/>
+            <a:ext cx="4343400" cy="1638300"/>
+          </a:xfrm>
+          <a:prstGeom prst="rect">
+            <a:avLst/>
+          </a:prstGeom>
+        </p:spPr>
+      </p:pic>
+    </p:spTree>
+    <p:extLst>
+      <p:ext uri="{BB962C8B-B14F-4D97-AF65-F5344CB8AC3E}">
+        <p14:creationId xmlns:p14="http://schemas.microsoft.com/office/powerpoint/2010/main" val="99838967"/>
+      </p:ext>
+    </p:extLst>
+  </p:cSld>
+  <p:clrMapOvr>
+    <a:masterClrMapping/>
+  </p:clrMapOvr>
+</p:sld>
+</file>
+
+<file path=ppt/slides/slide21.xml><?xml version="1.0" encoding="utf-8"?>
+<p:sld xmlns:a="http://schemas.openxmlformats.org/drawingml/2006/main" xmlns:r="http://schemas.openxmlformats.org/officeDocument/2006/relationships" xmlns:p="http://schemas.openxmlformats.org/presentationml/2006/main">
+  <p:cSld>
+    <p:spTree>
+      <p:nvGrpSpPr>
+        <p:cNvPr id="1" name="">
+          <a:extLst>
+            <a:ext uri="{FF2B5EF4-FFF2-40B4-BE49-F238E27FC236}">
+              <a16:creationId xmlns:a16="http://schemas.microsoft.com/office/drawing/2014/main" id="{998ACD8B-3FD3-6285-00F6-64C70CFEB211}"/>
+            </a:ext>
+          </a:extLst>
+        </p:cNvPr>
+        <p:cNvGrpSpPr/>
+        <p:nvPr/>
+      </p:nvGrpSpPr>
+      <p:grpSpPr>
+        <a:xfrm>
+          <a:off x="0" y="0"/>
+          <a:ext cx="0" cy="0"/>
+          <a:chOff x="0" y="0"/>
+          <a:chExt cx="0" cy="0"/>
+        </a:xfrm>
+      </p:grpSpPr>
+      <p:sp>
+        <p:nvSpPr>
+          <p:cNvPr id="2" name="Title 1">
+            <a:extLst>
+              <a:ext uri="{FF2B5EF4-FFF2-40B4-BE49-F238E27FC236}">
+                <a16:creationId xmlns:a16="http://schemas.microsoft.com/office/drawing/2014/main" id="{D5FDD2BD-9F6D-CFF1-39E2-E34A9A558FBA}"/>
+              </a:ext>
+            </a:extLst>
+          </p:cNvPr>
+          <p:cNvSpPr>
+            <a:spLocks noGrp="1"/>
+          </p:cNvSpPr>
+          <p:nvPr>
+            <p:ph type="ctrTitle"/>
+          </p:nvPr>
+        </p:nvSpPr>
+        <p:spPr>
+          <a:xfrm>
+            <a:off x="1524000" y="216429"/>
+            <a:ext cx="9144000" cy="668867"/>
+          </a:xfrm>
+        </p:spPr>
+        <p:txBody>
+          <a:bodyPr>
+            <a:normAutofit/>
+          </a:bodyPr>
+          <a:lstStyle/>
+          <a:p>
+            <a:r>
+              <a:rPr lang="en-US" sz="4000">
+                <a:ea typeface="+mj-lt"/>
+                <a:cs typeface="+mj-lt"/>
+              </a:rPr>
+              <a:t>Tool</a:t>
+            </a:r>
+            <a:endParaRPr lang="en-US"/>
+          </a:p>
+        </p:txBody>
+      </p:sp>
+      <p:sp>
+        <p:nvSpPr>
+          <p:cNvPr id="3" name="Subtitle 2">
+            <a:extLst>
+              <a:ext uri="{FF2B5EF4-FFF2-40B4-BE49-F238E27FC236}">
+                <a16:creationId xmlns:a16="http://schemas.microsoft.com/office/drawing/2014/main" id="{CD2246FA-A818-C9D3-813D-1103CA7A2C23}"/>
+              </a:ext>
+            </a:extLst>
+          </p:cNvPr>
+          <p:cNvSpPr>
+            <a:spLocks noGrp="1"/>
+          </p:cNvSpPr>
+          <p:nvPr>
+            <p:ph type="subTitle" idx="1"/>
+          </p:nvPr>
+        </p:nvSpPr>
+        <p:spPr>
+          <a:xfrm>
+            <a:off x="1524000" y="1019705"/>
+            <a:ext cx="9144000" cy="512762"/>
+          </a:xfrm>
+        </p:spPr>
+        <p:txBody>
+          <a:bodyPr vert="horz" lIns="91440" tIns="45720" rIns="91440" bIns="45720" rtlCol="0" anchor="t">
+            <a:normAutofit/>
+          </a:bodyPr>
+          <a:lstStyle/>
+          <a:p>
+            <a:r>
+              <a:rPr lang="en-US" sz="3000"/>
+              <a:t>How it works</a:t>
+            </a:r>
+          </a:p>
+        </p:txBody>
+      </p:sp>
+      <p:sp>
+        <p:nvSpPr>
+          <p:cNvPr id="4" name="TextBox 3">
+            <a:extLst>
+              <a:ext uri="{FF2B5EF4-FFF2-40B4-BE49-F238E27FC236}">
+                <a16:creationId xmlns:a16="http://schemas.microsoft.com/office/drawing/2014/main" id="{931AB3C5-2BA1-5870-A383-C725ABF49094}"/>
+              </a:ext>
+            </a:extLst>
+          </p:cNvPr>
+          <p:cNvSpPr txBox="1"/>
+          <p:nvPr/>
+        </p:nvSpPr>
+        <p:spPr>
+          <a:xfrm>
+            <a:off x="726068" y="2055746"/>
+            <a:ext cx="10735939" cy="3416320"/>
+          </a:xfrm>
+          <a:prstGeom prst="rect">
+            <a:avLst/>
+          </a:prstGeom>
+          <a:noFill/>
+        </p:spPr>
+        <p:txBody>
+          <a:bodyPr rot="0" spcFirstLastPara="0" vertOverflow="overflow" horzOverflow="overflow" vert="horz" wrap="square" lIns="91440" tIns="45720" rIns="91440" bIns="45720" numCol="1" spcCol="0" rtlCol="0" fromWordArt="0" anchor="t" anchorCtr="0" forceAA="0" compatLnSpc="1">
+            <a:prstTxWarp prst="textNoShape">
+              <a:avLst/>
+            </a:prstTxWarp>
+            <a:spAutoFit/>
+          </a:bodyPr>
+          <a:lstStyle/>
+          <a:p>
+            <a:r>
+              <a:rPr lang="en-US" dirty="0">
+                <a:ea typeface="+mn-lt"/>
+                <a:cs typeface="+mn-lt"/>
+              </a:rPr>
+              <a:t>The </a:t>
+            </a:r>
+            <a:r>
+              <a:rPr lang="en-US" dirty="0" err="1">
+                <a:ea typeface="+mn-lt"/>
+                <a:cs typeface="+mn-lt"/>
+              </a:rPr>
+              <a:t>risk_analysis</a:t>
+            </a:r>
+            <a:r>
+              <a:rPr lang="en-US" dirty="0">
+                <a:ea typeface="+mn-lt"/>
+                <a:cs typeface="+mn-lt"/>
+              </a:rPr>
+              <a:t>() function identifies critical reviewers whose removal would compromise the assignment. It performs a breadth-first search on the residual graph to determine which vertices are not reachable and derives the set of critical reviewers from this structure. This is best described further, in the corresponding section. </a:t>
+            </a:r>
+            <a:endParaRPr lang="en-US" dirty="0"/>
+          </a:p>
+          <a:p>
+            <a:r>
+              <a:rPr lang="en-US" dirty="0">
+                <a:ea typeface="+mn-lt"/>
+                <a:cs typeface="+mn-lt"/>
+              </a:rPr>
+              <a:t>The </a:t>
+            </a:r>
+            <a:r>
+              <a:rPr lang="en-US" dirty="0" err="1">
+                <a:ea typeface="+mn-lt"/>
+                <a:cs typeface="+mn-lt"/>
+              </a:rPr>
+              <a:t>get_missing_output</a:t>
+            </a:r>
+            <a:r>
+              <a:rPr lang="en-US" dirty="0">
+                <a:ea typeface="+mn-lt"/>
+                <a:cs typeface="+mn-lt"/>
+              </a:rPr>
+              <a:t>() function identifies submissions that did not receive the required number of reviewers by inspecting edges whose flow does not meet their capacity. These are stored and sorted for reporting. </a:t>
+            </a:r>
+            <a:endParaRPr lang="en-US" dirty="0"/>
+          </a:p>
+          <a:p>
+            <a:r>
+              <a:rPr lang="en-US">
+                <a:ea typeface="+mn-lt"/>
+                <a:cs typeface="+mn-lt"/>
+              </a:rPr>
+              <a:t>The class supports printing results to the console or saving them to a file. Outputs include the </a:t>
+            </a:r>
+            <a:r>
+              <a:rPr lang="en-US" dirty="0">
+                <a:ea typeface="+mn-lt"/>
+                <a:cs typeface="+mn-lt"/>
+              </a:rPr>
+              <a:t>assignment results, missing assignments, and risk analysis.</a:t>
+            </a:r>
+            <a:endParaRPr lang="en-US"/>
+          </a:p>
+          <a:p>
+            <a:endParaRPr lang="en-US" dirty="0">
+              <a:ea typeface="+mn-lt"/>
+              <a:cs typeface="+mn-lt"/>
+            </a:endParaRPr>
+          </a:p>
+          <a:p>
+            <a:endParaRPr lang="en-US" dirty="0">
+              <a:ea typeface="+mn-lt"/>
+              <a:cs typeface="+mn-lt"/>
+            </a:endParaRPr>
+          </a:p>
+          <a:p>
+            <a:pPr algn="l"/>
+            <a:endParaRPr lang="en-US" dirty="0"/>
+          </a:p>
+        </p:txBody>
+      </p:sp>
+    </p:spTree>
+    <p:extLst>
+      <p:ext uri="{BB962C8B-B14F-4D97-AF65-F5344CB8AC3E}">
+        <p14:creationId xmlns:p14="http://schemas.microsoft.com/office/powerpoint/2010/main" val="832998071"/>
+      </p:ext>
+    </p:extLst>
+  </p:cSld>
+  <p:clrMapOvr>
+    <a:masterClrMapping/>
+  </p:clrMapOvr>
+</p:sld>
+</file>
+
+<file path=ppt/slides/slide22.xml><?xml version="1.0" encoding="utf-8"?>
+<p:sld xmlns:a="http://schemas.openxmlformats.org/drawingml/2006/main" xmlns:r="http://schemas.openxmlformats.org/officeDocument/2006/relationships" xmlns:p="http://schemas.openxmlformats.org/presentationml/2006/main">
+  <p:cSld>
+    <p:spTree>
+      <p:nvGrpSpPr>
+        <p:cNvPr id="1" name="">
+          <a:extLst>
+            <a:ext uri="{FF2B5EF4-FFF2-40B4-BE49-F238E27FC236}">
               <a16:creationId xmlns:a16="http://schemas.microsoft.com/office/drawing/2014/main" id="{F6DA62C1-D2DE-1B47-E97D-3E393BADA60C}"/>
             </a:ext>
           </a:extLst>
@@ -5696,7 +6020,7 @@
 </p:sld>
 </file>
 
-<file path=ppt/slides/slide21.xml><?xml version="1.0" encoding="utf-8"?>
+<file path=ppt/slides/slide23.xml><?xml version="1.0" encoding="utf-8"?>
 <p:sld xmlns:a="http://schemas.openxmlformats.org/drawingml/2006/main" xmlns:r="http://schemas.openxmlformats.org/officeDocument/2006/relationships" xmlns:p="http://schemas.openxmlformats.org/presentationml/2006/main">
   <p:cSld>
     <p:spTree>
@@ -5866,7 +6190,7 @@
 </p:sld>
 </file>
 
-<file path=ppt/slides/slide22.xml><?xml version="1.0" encoding="utf-8"?>
+<file path=ppt/slides/slide24.xml><?xml version="1.0" encoding="utf-8"?>
 <p:sld xmlns:a="http://schemas.openxmlformats.org/drawingml/2006/main" xmlns:r="http://schemas.openxmlformats.org/officeDocument/2006/relationships" xmlns:p="http://schemas.openxmlformats.org/presentationml/2006/main">
   <p:cSld>
     <p:spTree>
@@ -6123,7 +6447,7 @@
 </p:sld>
 </file>
 
-<file path=ppt/slides/slide23.xml><?xml version="1.0" encoding="utf-8"?>
+<file path=ppt/slides/slide25.xml><?xml version="1.0" encoding="utf-8"?>
 <p:sld xmlns:a="http://schemas.openxmlformats.org/drawingml/2006/main" xmlns:r="http://schemas.openxmlformats.org/officeDocument/2006/relationships" xmlns:p="http://schemas.openxmlformats.org/presentationml/2006/main">
   <p:cSld>
     <p:spTree>
@@ -6296,7 +6620,7 @@
 </p:sld>
 </file>
 
-<file path=ppt/slides/slide24.xml><?xml version="1.0" encoding="utf-8"?>
+<file path=ppt/slides/slide26.xml><?xml version="1.0" encoding="utf-8"?>
 <p:sld xmlns:a="http://schemas.openxmlformats.org/drawingml/2006/main" xmlns:r="http://schemas.openxmlformats.org/officeDocument/2006/relationships" xmlns:p="http://schemas.openxmlformats.org/presentationml/2006/main">
   <p:cSld>
     <p:spTree>
@@ -6436,7 +6760,7 @@
 </p:sld>
 </file>
 
-<file path=ppt/slides/slide25.xml><?xml version="1.0" encoding="utf-8"?>
+<file path=ppt/slides/slide27.xml><?xml version="1.0" encoding="utf-8"?>
 <p:sld xmlns:a="http://schemas.openxmlformats.org/drawingml/2006/main" xmlns:r="http://schemas.openxmlformats.org/officeDocument/2006/relationships" xmlns:p="http://schemas.openxmlformats.org/presentationml/2006/main">
   <p:cSld>
     <p:spTree>
@@ -6605,7 +6929,7 @@
 </p:sld>
 </file>
 
-<file path=ppt/slides/slide26.xml><?xml version="1.0" encoding="utf-8"?>
+<file path=ppt/slides/slide28.xml><?xml version="1.0" encoding="utf-8"?>
 <p:sld xmlns:a="http://schemas.openxmlformats.org/drawingml/2006/main" xmlns:r="http://schemas.openxmlformats.org/officeDocument/2006/relationships" xmlns:p="http://schemas.openxmlformats.org/presentationml/2006/main">
   <p:cSld>
     <p:spTree>
@@ -6951,6 +7275,388 @@
         <p:cNvPr id="1" name="">
           <a:extLst>
             <a:ext uri="{FF2B5EF4-FFF2-40B4-BE49-F238E27FC236}">
+              <a16:creationId xmlns:a16="http://schemas.microsoft.com/office/drawing/2014/main" id="{C4FE9BD3-9CCC-2AB9-9C88-C80E31AB04E9}"/>
+            </a:ext>
+          </a:extLst>
+        </p:cNvPr>
+        <p:cNvGrpSpPr/>
+        <p:nvPr/>
+      </p:nvGrpSpPr>
+      <p:grpSpPr>
+        <a:xfrm>
+          <a:off x="0" y="0"/>
+          <a:ext cx="0" cy="0"/>
+          <a:chOff x="0" y="0"/>
+          <a:chExt cx="0" cy="0"/>
+        </a:xfrm>
+      </p:grpSpPr>
+      <p:sp>
+        <p:nvSpPr>
+          <p:cNvPr id="2" name="Title 1">
+            <a:extLst>
+              <a:ext uri="{FF2B5EF4-FFF2-40B4-BE49-F238E27FC236}">
+                <a16:creationId xmlns:a16="http://schemas.microsoft.com/office/drawing/2014/main" id="{77FD565D-E3CD-B0D3-4852-1BBA90D73260}"/>
+              </a:ext>
+            </a:extLst>
+          </p:cNvPr>
+          <p:cNvSpPr>
+            <a:spLocks noGrp="1"/>
+          </p:cNvSpPr>
+          <p:nvPr>
+            <p:ph type="ctrTitle"/>
+          </p:nvPr>
+        </p:nvSpPr>
+        <p:spPr>
+          <a:xfrm>
+            <a:off x="1524000" y="216429"/>
+            <a:ext cx="9144000" cy="668867"/>
+          </a:xfrm>
+        </p:spPr>
+        <p:txBody>
+          <a:bodyPr>
+            <a:normAutofit/>
+          </a:bodyPr>
+          <a:lstStyle/>
+          <a:p>
+            <a:r>
+              <a:rPr lang="en-US" sz="4000">
+                <a:ea typeface="+mj-lt"/>
+                <a:cs typeface="+mj-lt"/>
+              </a:rPr>
+              <a:t>TUI (menu)</a:t>
+            </a:r>
+            <a:endParaRPr lang="en-US" sz="4000"/>
+          </a:p>
+        </p:txBody>
+      </p:sp>
+      <p:sp>
+        <p:nvSpPr>
+          <p:cNvPr id="3" name="Subtitle 2">
+            <a:extLst>
+              <a:ext uri="{FF2B5EF4-FFF2-40B4-BE49-F238E27FC236}">
+                <a16:creationId xmlns:a16="http://schemas.microsoft.com/office/drawing/2014/main" id="{0BA4C89E-6F3F-91F5-691A-CEB3358FFBB2}"/>
+              </a:ext>
+            </a:extLst>
+          </p:cNvPr>
+          <p:cNvSpPr>
+            <a:spLocks noGrp="1"/>
+          </p:cNvSpPr>
+          <p:nvPr>
+            <p:ph type="subTitle" idx="1"/>
+          </p:nvPr>
+        </p:nvSpPr>
+        <p:spPr>
+          <a:xfrm>
+            <a:off x="1524000" y="1019705"/>
+            <a:ext cx="9144000" cy="512762"/>
+          </a:xfrm>
+        </p:spPr>
+        <p:txBody>
+          <a:bodyPr vert="horz" lIns="91440" tIns="45720" rIns="91440" bIns="45720" rtlCol="0" anchor="t">
+            <a:normAutofit/>
+          </a:bodyPr>
+          <a:lstStyle/>
+          <a:p>
+            <a:r>
+              <a:rPr lang="en-US" sz="3000"/>
+              <a:t>How it works</a:t>
+            </a:r>
+          </a:p>
+        </p:txBody>
+      </p:sp>
+      <p:sp>
+        <p:nvSpPr>
+          <p:cNvPr id="4" name="TextBox 3">
+            <a:extLst>
+              <a:ext uri="{FF2B5EF4-FFF2-40B4-BE49-F238E27FC236}">
+                <a16:creationId xmlns:a16="http://schemas.microsoft.com/office/drawing/2014/main" id="{46EAE028-DD38-C4DA-BFCC-4D468E03960B}"/>
+              </a:ext>
+            </a:extLst>
+          </p:cNvPr>
+          <p:cNvSpPr txBox="1"/>
+          <p:nvPr/>
+        </p:nvSpPr>
+        <p:spPr>
+          <a:xfrm>
+            <a:off x="726068" y="2055746"/>
+            <a:ext cx="10745231" cy="923330"/>
+          </a:xfrm>
+          <a:prstGeom prst="rect">
+            <a:avLst/>
+          </a:prstGeom>
+          <a:noFill/>
+        </p:spPr>
+        <p:txBody>
+          <a:bodyPr rot="0" spcFirstLastPara="0" vertOverflow="overflow" horzOverflow="overflow" vert="horz" wrap="square" lIns="91440" tIns="45720" rIns="91440" bIns="45720" numCol="1" spcCol="0" rtlCol="0" fromWordArt="0" anchor="t" anchorCtr="0" forceAA="0" compatLnSpc="1">
+            <a:prstTxWarp prst="textNoShape">
+              <a:avLst/>
+            </a:prstTxWarp>
+            <a:spAutoFit/>
+          </a:bodyPr>
+          <a:lstStyle/>
+          <a:p>
+            <a:r>
+              <a:rPr lang="en-US" dirty="0">
+                <a:ea typeface="+mn-lt"/>
+                <a:cs typeface="+mn-lt"/>
+              </a:rPr>
+              <a:t>The Tui class is responsible for the terminal interface, handling user inputs and calling the respective tool methods for running the algorithms and showing outputs.</a:t>
+            </a:r>
+          </a:p>
+          <a:p>
+            <a:endParaRPr lang="en-US" dirty="0"/>
+          </a:p>
+        </p:txBody>
+      </p:sp>
+      <p:pic>
+        <p:nvPicPr>
+          <p:cNvPr id="5" name="Picture 4" descr="A screenshot of a computer program&#10;&#10;AI-generated content may be incorrect.">
+            <a:extLst>
+              <a:ext uri="{FF2B5EF4-FFF2-40B4-BE49-F238E27FC236}">
+                <a16:creationId xmlns:a16="http://schemas.microsoft.com/office/drawing/2014/main" id="{ED22861D-306E-D786-38E7-CE742D97AC65}"/>
+              </a:ext>
+            </a:extLst>
+          </p:cNvPr>
+          <p:cNvPicPr>
+            <a:picLocks noChangeAspect="1"/>
+          </p:cNvPicPr>
+          <p:nvPr/>
+        </p:nvPicPr>
+        <p:blipFill>
+          <a:blip r:embed="rId2"/>
+          <a:stretch>
+            <a:fillRect/>
+          </a:stretch>
+        </p:blipFill>
+        <p:spPr>
+          <a:xfrm>
+            <a:off x="2909887" y="4158714"/>
+            <a:ext cx="6372225" cy="1390650"/>
+          </a:xfrm>
+          <a:prstGeom prst="rect">
+            <a:avLst/>
+          </a:prstGeom>
+        </p:spPr>
+      </p:pic>
+    </p:spTree>
+    <p:extLst>
+      <p:ext uri="{BB962C8B-B14F-4D97-AF65-F5344CB8AC3E}">
+        <p14:creationId xmlns:p14="http://schemas.microsoft.com/office/powerpoint/2010/main" val="3791368023"/>
+      </p:ext>
+    </p:extLst>
+  </p:cSld>
+  <p:clrMapOvr>
+    <a:masterClrMapping/>
+  </p:clrMapOvr>
+</p:sld>
+</file>
+
+<file path=ppt/slides/slide5.xml><?xml version="1.0" encoding="utf-8"?>
+<p:sld xmlns:a="http://schemas.openxmlformats.org/drawingml/2006/main" xmlns:r="http://schemas.openxmlformats.org/officeDocument/2006/relationships" xmlns:p="http://schemas.openxmlformats.org/presentationml/2006/main">
+  <p:cSld>
+    <p:spTree>
+      <p:nvGrpSpPr>
+        <p:cNvPr id="1" name="">
+          <a:extLst>
+            <a:ext uri="{FF2B5EF4-FFF2-40B4-BE49-F238E27FC236}">
+              <a16:creationId xmlns:a16="http://schemas.microsoft.com/office/drawing/2014/main" id="{90D97374-769B-AFCB-00CA-385A5AE4FE05}"/>
+            </a:ext>
+          </a:extLst>
+        </p:cNvPr>
+        <p:cNvGrpSpPr/>
+        <p:nvPr/>
+      </p:nvGrpSpPr>
+      <p:grpSpPr>
+        <a:xfrm>
+          <a:off x="0" y="0"/>
+          <a:ext cx="0" cy="0"/>
+          <a:chOff x="0" y="0"/>
+          <a:chExt cx="0" cy="0"/>
+        </a:xfrm>
+      </p:grpSpPr>
+      <p:sp>
+        <p:nvSpPr>
+          <p:cNvPr id="2" name="Title 1">
+            <a:extLst>
+              <a:ext uri="{FF2B5EF4-FFF2-40B4-BE49-F238E27FC236}">
+                <a16:creationId xmlns:a16="http://schemas.microsoft.com/office/drawing/2014/main" id="{E8E1BF8C-F8ED-54B6-E5E7-BAE9CE5D63F0}"/>
+              </a:ext>
+            </a:extLst>
+          </p:cNvPr>
+          <p:cNvSpPr>
+            <a:spLocks noGrp="1"/>
+          </p:cNvSpPr>
+          <p:nvPr>
+            <p:ph type="ctrTitle"/>
+          </p:nvPr>
+        </p:nvSpPr>
+        <p:spPr>
+          <a:xfrm>
+            <a:off x="1524000" y="216429"/>
+            <a:ext cx="9144000" cy="668867"/>
+          </a:xfrm>
+        </p:spPr>
+        <p:txBody>
+          <a:bodyPr>
+            <a:normAutofit/>
+          </a:bodyPr>
+          <a:lstStyle/>
+          <a:p>
+            <a:r>
+              <a:rPr lang="en-US" sz="4000">
+                <a:ea typeface="+mj-lt"/>
+                <a:cs typeface="+mj-lt"/>
+              </a:rPr>
+              <a:t>TUI (menu)</a:t>
+            </a:r>
+            <a:endParaRPr lang="en-US" sz="4000"/>
+          </a:p>
+        </p:txBody>
+      </p:sp>
+      <p:sp>
+        <p:nvSpPr>
+          <p:cNvPr id="3" name="Subtitle 2">
+            <a:extLst>
+              <a:ext uri="{FF2B5EF4-FFF2-40B4-BE49-F238E27FC236}">
+                <a16:creationId xmlns:a16="http://schemas.microsoft.com/office/drawing/2014/main" id="{4F0E30E0-F99E-4444-0312-BB98A33E52C7}"/>
+              </a:ext>
+            </a:extLst>
+          </p:cNvPr>
+          <p:cNvSpPr>
+            <a:spLocks noGrp="1"/>
+          </p:cNvSpPr>
+          <p:nvPr>
+            <p:ph type="subTitle" idx="1"/>
+          </p:nvPr>
+        </p:nvSpPr>
+        <p:spPr>
+          <a:xfrm>
+            <a:off x="1524000" y="1019705"/>
+            <a:ext cx="9144000" cy="512762"/>
+          </a:xfrm>
+        </p:spPr>
+        <p:txBody>
+          <a:bodyPr vert="horz" lIns="91440" tIns="45720" rIns="91440" bIns="45720" rtlCol="0" anchor="t">
+            <a:normAutofit/>
+          </a:bodyPr>
+          <a:lstStyle/>
+          <a:p>
+            <a:r>
+              <a:rPr lang="en-US" sz="3000"/>
+              <a:t>How it works</a:t>
+            </a:r>
+          </a:p>
+        </p:txBody>
+      </p:sp>
+      <p:sp>
+        <p:nvSpPr>
+          <p:cNvPr id="4" name="TextBox 3">
+            <a:extLst>
+              <a:ext uri="{FF2B5EF4-FFF2-40B4-BE49-F238E27FC236}">
+                <a16:creationId xmlns:a16="http://schemas.microsoft.com/office/drawing/2014/main" id="{58D5C101-D193-DA86-CB6B-11B5B65B4017}"/>
+              </a:ext>
+            </a:extLst>
+          </p:cNvPr>
+          <p:cNvSpPr txBox="1"/>
+          <p:nvPr/>
+        </p:nvSpPr>
+        <p:spPr>
+          <a:xfrm>
+            <a:off x="726068" y="2055746"/>
+            <a:ext cx="6173231" cy="1200329"/>
+          </a:xfrm>
+          <a:prstGeom prst="rect">
+            <a:avLst/>
+          </a:prstGeom>
+          <a:noFill/>
+        </p:spPr>
+        <p:txBody>
+          <a:bodyPr rot="0" spcFirstLastPara="0" vertOverflow="overflow" horzOverflow="overflow" vert="horz" wrap="square" lIns="91440" tIns="45720" rIns="91440" bIns="45720" numCol="1" spcCol="0" rtlCol="0" fromWordArt="0" anchor="t" anchorCtr="0" forceAA="0" compatLnSpc="1">
+            <a:prstTxWarp prst="textNoShape">
+              <a:avLst/>
+            </a:prstTxWarp>
+            <a:spAutoFit/>
+          </a:bodyPr>
+          <a:lstStyle/>
+          <a:p>
+            <a:r>
+              <a:rPr lang="en-US" dirty="0">
+                <a:ea typeface="+mn-lt"/>
+                <a:cs typeface="+mn-lt"/>
+              </a:rPr>
+              <a:t>The </a:t>
+            </a:r>
+            <a:r>
+              <a:rPr lang="en-US" dirty="0" err="1">
+                <a:ea typeface="+mn-lt"/>
+                <a:cs typeface="+mn-lt"/>
+              </a:rPr>
+              <a:t>runHandler</a:t>
+            </a:r>
+            <a:r>
+              <a:rPr lang="en-US" dirty="0">
+                <a:ea typeface="+mn-lt"/>
+                <a:cs typeface="+mn-lt"/>
+              </a:rPr>
+              <a:t>() is the method responsible for the main loop, displaying the current state's menu, and handling user input</a:t>
+            </a:r>
+          </a:p>
+          <a:p>
+            <a:endParaRPr lang="en-US" dirty="0"/>
+          </a:p>
+        </p:txBody>
+      </p:sp>
+      <p:pic>
+        <p:nvPicPr>
+          <p:cNvPr id="6" name="Picture 5" descr="A screen shot of a computer code&#10;&#10;AI-generated content may be incorrect.">
+            <a:extLst>
+              <a:ext uri="{FF2B5EF4-FFF2-40B4-BE49-F238E27FC236}">
+                <a16:creationId xmlns:a16="http://schemas.microsoft.com/office/drawing/2014/main" id="{1E5758F6-E37E-6EEB-46E7-CD2B23464FE1}"/>
+              </a:ext>
+            </a:extLst>
+          </p:cNvPr>
+          <p:cNvPicPr>
+            <a:picLocks noChangeAspect="1"/>
+          </p:cNvPicPr>
+          <p:nvPr/>
+        </p:nvPicPr>
+        <p:blipFill>
+          <a:blip r:embed="rId2"/>
+          <a:stretch>
+            <a:fillRect/>
+          </a:stretch>
+        </p:blipFill>
+        <p:spPr>
+          <a:xfrm>
+            <a:off x="8143527" y="2057749"/>
+            <a:ext cx="3171825" cy="1571625"/>
+          </a:xfrm>
+          <a:prstGeom prst="rect">
+            <a:avLst/>
+          </a:prstGeom>
+        </p:spPr>
+      </p:pic>
+    </p:spTree>
+    <p:extLst>
+      <p:ext uri="{BB962C8B-B14F-4D97-AF65-F5344CB8AC3E}">
+        <p14:creationId xmlns:p14="http://schemas.microsoft.com/office/powerpoint/2010/main" val="1813558794"/>
+      </p:ext>
+    </p:extLst>
+  </p:cSld>
+  <p:clrMapOvr>
+    <a:masterClrMapping/>
+  </p:clrMapOvr>
+</p:sld>
+</file>
+
+<file path=ppt/slides/slide6.xml><?xml version="1.0" encoding="utf-8"?>
+<p:sld xmlns:a="http://schemas.openxmlformats.org/drawingml/2006/main" xmlns:r="http://schemas.openxmlformats.org/officeDocument/2006/relationships" xmlns:p="http://schemas.openxmlformats.org/presentationml/2006/main">
+  <p:cSld>
+    <p:spTree>
+      <p:nvGrpSpPr>
+        <p:cNvPr id="1" name="">
+          <a:extLst>
+            <a:ext uri="{FF2B5EF4-FFF2-40B4-BE49-F238E27FC236}">
               <a16:creationId xmlns:a16="http://schemas.microsoft.com/office/drawing/2014/main" id="{A5E21AC9-54A5-97CC-C6A1-77EB52F60B86}"/>
             </a:ext>
           </a:extLst>
@@ -7129,7 +7835,7 @@
 </p:sld>
 </file>
 
-<file path=ppt/slides/slide5.xml><?xml version="1.0" encoding="utf-8"?>
+<file path=ppt/slides/slide7.xml><?xml version="1.0" encoding="utf-8"?>
 <p:sld xmlns:a="http://schemas.openxmlformats.org/drawingml/2006/main" xmlns:r="http://schemas.openxmlformats.org/officeDocument/2006/relationships" xmlns:p="http://schemas.openxmlformats.org/presentationml/2006/main">
   <p:cSld>
     <p:spTree>
@@ -7366,7 +8072,7 @@
 </p:sld>
 </file>
 
-<file path=ppt/slides/slide6.xml><?xml version="1.0" encoding="utf-8"?>
+<file path=ppt/slides/slide8.xml><?xml version="1.0" encoding="utf-8"?>
 <p:sld xmlns:a="http://schemas.openxmlformats.org/drawingml/2006/main" xmlns:r="http://schemas.openxmlformats.org/officeDocument/2006/relationships" xmlns:p="http://schemas.openxmlformats.org/presentationml/2006/main">
   <p:cSld>
     <p:spTree>
@@ -7594,7 +8300,7 @@
 </p:sld>
 </file>
 
-<file path=ppt/slides/slide7.xml><?xml version="1.0" encoding="utf-8"?>
+<file path=ppt/slides/slide9.xml><?xml version="1.0" encoding="utf-8"?>
 <p:sld xmlns:a="http://schemas.openxmlformats.org/drawingml/2006/main" xmlns:r="http://schemas.openxmlformats.org/officeDocument/2006/relationships" xmlns:p="http://schemas.openxmlformats.org/presentationml/2006/main">
   <p:cSld>
     <p:spTree>
@@ -7776,328 +8482,6 @@
     <p:extLst>
       <p:ext uri="{BB962C8B-B14F-4D97-AF65-F5344CB8AC3E}">
         <p14:creationId xmlns:p14="http://schemas.microsoft.com/office/powerpoint/2010/main" val="448000017"/>
-      </p:ext>
-    </p:extLst>
-  </p:cSld>
-  <p:clrMapOvr>
-    <a:masterClrMapping/>
-  </p:clrMapOvr>
-</p:sld>
-</file>
-
-<file path=ppt/slides/slide8.xml><?xml version="1.0" encoding="utf-8"?>
-<p:sld xmlns:a="http://schemas.openxmlformats.org/drawingml/2006/main" xmlns:r="http://schemas.openxmlformats.org/officeDocument/2006/relationships" xmlns:p="http://schemas.openxmlformats.org/presentationml/2006/main">
-  <p:cSld>
-    <p:spTree>
-      <p:nvGrpSpPr>
-        <p:cNvPr id="1" name="">
-          <a:extLst>
-            <a:ext uri="{FF2B5EF4-FFF2-40B4-BE49-F238E27FC236}">
-              <a16:creationId xmlns:a16="http://schemas.microsoft.com/office/drawing/2014/main" id="{3FC44ACF-5129-3431-3379-838A0413EF8F}"/>
-            </a:ext>
-          </a:extLst>
-        </p:cNvPr>
-        <p:cNvGrpSpPr/>
-        <p:nvPr/>
-      </p:nvGrpSpPr>
-      <p:grpSpPr>
-        <a:xfrm>
-          <a:off x="0" y="0"/>
-          <a:ext cx="0" cy="0"/>
-          <a:chOff x="0" y="0"/>
-          <a:chExt cx="0" cy="0"/>
-        </a:xfrm>
-      </p:grpSpPr>
-      <p:sp>
-        <p:nvSpPr>
-          <p:cNvPr id="2" name="Title 1">
-            <a:extLst>
-              <a:ext uri="{FF2B5EF4-FFF2-40B4-BE49-F238E27FC236}">
-                <a16:creationId xmlns:a16="http://schemas.microsoft.com/office/drawing/2014/main" id="{8572D0CF-7DBC-059B-6681-27195D13F06E}"/>
-              </a:ext>
-            </a:extLst>
-          </p:cNvPr>
-          <p:cNvSpPr>
-            <a:spLocks noGrp="1"/>
-          </p:cNvSpPr>
-          <p:nvPr>
-            <p:ph type="ctrTitle"/>
-          </p:nvPr>
-        </p:nvSpPr>
-        <p:spPr>
-          <a:xfrm>
-            <a:off x="1524000" y="216429"/>
-            <a:ext cx="9144000" cy="668867"/>
-          </a:xfrm>
-        </p:spPr>
-        <p:txBody>
-          <a:bodyPr>
-            <a:normAutofit/>
-          </a:bodyPr>
-          <a:lstStyle/>
-          <a:p>
-            <a:r>
-              <a:rPr lang="en-US" sz="4000">
-                <a:ea typeface="+mj-lt"/>
-                <a:cs typeface="+mj-lt"/>
-              </a:rPr>
-              <a:t>Parser</a:t>
-            </a:r>
-            <a:endParaRPr lang="en-US" sz="4000"/>
-          </a:p>
-        </p:txBody>
-      </p:sp>
-      <p:sp>
-        <p:nvSpPr>
-          <p:cNvPr id="3" name="Subtitle 2">
-            <a:extLst>
-              <a:ext uri="{FF2B5EF4-FFF2-40B4-BE49-F238E27FC236}">
-                <a16:creationId xmlns:a16="http://schemas.microsoft.com/office/drawing/2014/main" id="{02B69142-63DB-5493-8C1C-03A4C3378CEA}"/>
-              </a:ext>
-            </a:extLst>
-          </p:cNvPr>
-          <p:cNvSpPr>
-            <a:spLocks noGrp="1"/>
-          </p:cNvSpPr>
-          <p:nvPr>
-            <p:ph type="subTitle" idx="1"/>
-          </p:nvPr>
-        </p:nvSpPr>
-        <p:spPr>
-          <a:xfrm>
-            <a:off x="1254512" y="1019705"/>
-            <a:ext cx="9692268" cy="512762"/>
-          </a:xfrm>
-        </p:spPr>
-        <p:txBody>
-          <a:bodyPr vert="horz" lIns="91440" tIns="45720" rIns="91440" bIns="45720" rtlCol="0" anchor="t">
-            <a:noAutofit/>
-          </a:bodyPr>
-          <a:lstStyle/>
-          <a:p>
-            <a:r>
-              <a:rPr lang="en-US" sz="3000"/>
-              <a:t>Why it needs to read the file from the start for each header</a:t>
-            </a:r>
-          </a:p>
-          <a:p>
-            <a:endParaRPr lang="en-US" sz="3000" dirty="0"/>
-          </a:p>
-        </p:txBody>
-      </p:sp>
-      <p:sp>
-        <p:nvSpPr>
-          <p:cNvPr id="4" name="TextBox 3">
-            <a:extLst>
-              <a:ext uri="{FF2B5EF4-FFF2-40B4-BE49-F238E27FC236}">
-                <a16:creationId xmlns:a16="http://schemas.microsoft.com/office/drawing/2014/main" id="{30B55B87-252D-197D-DCDE-B1292264ACCD}"/>
-              </a:ext>
-            </a:extLst>
-          </p:cNvPr>
-          <p:cNvSpPr txBox="1"/>
-          <p:nvPr/>
-        </p:nvSpPr>
-        <p:spPr>
-          <a:xfrm>
-            <a:off x="726068" y="2055746"/>
-            <a:ext cx="10745231" cy="1477328"/>
-          </a:xfrm>
-          <a:prstGeom prst="rect">
-            <a:avLst/>
-          </a:prstGeom>
-          <a:noFill/>
-        </p:spPr>
-        <p:txBody>
-          <a:bodyPr rot="0" spcFirstLastPara="0" vertOverflow="overflow" horzOverflow="overflow" vert="horz" wrap="square" lIns="91440" tIns="45720" rIns="91440" bIns="45720" numCol="1" spcCol="0" rtlCol="0" fromWordArt="0" anchor="t" anchorCtr="0" forceAA="0" compatLnSpc="1">
-            <a:prstTxWarp prst="textNoShape">
-              <a:avLst/>
-            </a:prstTxWarp>
-            <a:spAutoFit/>
-          </a:bodyPr>
-          <a:lstStyle/>
-          <a:p>
-            <a:r>
-              <a:rPr lang="en-US" dirty="0">
-                <a:ea typeface="+mn-lt"/>
-                <a:cs typeface="+mn-lt"/>
-              </a:rPr>
-              <a:t>Due to some irregularities in the dataset file (e.g. An '#' between Submissions and Reviewers) and some doubts about the .csv structure (e.g. Can the topics have a different order), led us to make the decision to create the most generic parser to avoid problems in the future.</a:t>
-            </a:r>
-            <a:endParaRPr lang="en-US" dirty="0"/>
-          </a:p>
-          <a:p>
-            <a:endParaRPr lang="en-US" dirty="0"/>
-          </a:p>
-          <a:p>
-            <a:pPr algn="l"/>
-            <a:endParaRPr lang="en-US" dirty="0"/>
-          </a:p>
-        </p:txBody>
-      </p:sp>
-    </p:spTree>
-    <p:extLst>
-      <p:ext uri="{BB962C8B-B14F-4D97-AF65-F5344CB8AC3E}">
-        <p14:creationId xmlns:p14="http://schemas.microsoft.com/office/powerpoint/2010/main" val="1781105893"/>
-      </p:ext>
-    </p:extLst>
-  </p:cSld>
-  <p:clrMapOvr>
-    <a:masterClrMapping/>
-  </p:clrMapOvr>
-</p:sld>
-</file>
-
-<file path=ppt/slides/slide9.xml><?xml version="1.0" encoding="utf-8"?>
-<p:sld xmlns:a="http://schemas.openxmlformats.org/drawingml/2006/main" xmlns:r="http://schemas.openxmlformats.org/officeDocument/2006/relationships" xmlns:p="http://schemas.openxmlformats.org/presentationml/2006/main">
-  <p:cSld>
-    <p:spTree>
-      <p:nvGrpSpPr>
-        <p:cNvPr id="1" name="">
-          <a:extLst>
-            <a:ext uri="{FF2B5EF4-FFF2-40B4-BE49-F238E27FC236}">
-              <a16:creationId xmlns:a16="http://schemas.microsoft.com/office/drawing/2014/main" id="{79EC3670-619A-97DC-6C2B-272EBC8D1FF0}"/>
-            </a:ext>
-          </a:extLst>
-        </p:cNvPr>
-        <p:cNvGrpSpPr/>
-        <p:nvPr/>
-      </p:nvGrpSpPr>
-      <p:grpSpPr>
-        <a:xfrm>
-          <a:off x="0" y="0"/>
-          <a:ext cx="0" cy="0"/>
-          <a:chOff x="0" y="0"/>
-          <a:chExt cx="0" cy="0"/>
-        </a:xfrm>
-      </p:grpSpPr>
-      <p:sp>
-        <p:nvSpPr>
-          <p:cNvPr id="2" name="Title 1">
-            <a:extLst>
-              <a:ext uri="{FF2B5EF4-FFF2-40B4-BE49-F238E27FC236}">
-                <a16:creationId xmlns:a16="http://schemas.microsoft.com/office/drawing/2014/main" id="{660E874B-561E-2F3B-3540-72184106D3B6}"/>
-              </a:ext>
-            </a:extLst>
-          </p:cNvPr>
-          <p:cNvSpPr>
-            <a:spLocks noGrp="1"/>
-          </p:cNvSpPr>
-          <p:nvPr>
-            <p:ph type="ctrTitle"/>
-          </p:nvPr>
-        </p:nvSpPr>
-        <p:spPr>
-          <a:xfrm>
-            <a:off x="1524000" y="216429"/>
-            <a:ext cx="9144000" cy="668867"/>
-          </a:xfrm>
-        </p:spPr>
-        <p:txBody>
-          <a:bodyPr>
-            <a:normAutofit/>
-          </a:bodyPr>
-          <a:lstStyle/>
-          <a:p>
-            <a:r>
-              <a:rPr lang="en-US" sz="4000">
-                <a:ea typeface="+mj-lt"/>
-                <a:cs typeface="+mj-lt"/>
-              </a:rPr>
-              <a:t>Parser</a:t>
-            </a:r>
-            <a:endParaRPr lang="en-US" sz="4000"/>
-          </a:p>
-        </p:txBody>
-      </p:sp>
-      <p:sp>
-        <p:nvSpPr>
-          <p:cNvPr id="3" name="Subtitle 2">
-            <a:extLst>
-              <a:ext uri="{FF2B5EF4-FFF2-40B4-BE49-F238E27FC236}">
-                <a16:creationId xmlns:a16="http://schemas.microsoft.com/office/drawing/2014/main" id="{81664839-6FA2-A523-BBD1-E881B2C474FA}"/>
-              </a:ext>
-            </a:extLst>
-          </p:cNvPr>
-          <p:cNvSpPr>
-            <a:spLocks noGrp="1"/>
-          </p:cNvSpPr>
-          <p:nvPr>
-            <p:ph type="subTitle" idx="1"/>
-          </p:nvPr>
-        </p:nvSpPr>
-        <p:spPr>
-          <a:xfrm>
-            <a:off x="1254512" y="1019705"/>
-            <a:ext cx="9692268" cy="512762"/>
-          </a:xfrm>
-        </p:spPr>
-        <p:txBody>
-          <a:bodyPr vert="horz" lIns="91440" tIns="45720" rIns="91440" bIns="45720" rtlCol="0" anchor="t">
-            <a:noAutofit/>
-          </a:bodyPr>
-          <a:lstStyle/>
-          <a:p>
-            <a:r>
-              <a:rPr lang="en-US" sz="3000"/>
-              <a:t>Time complexity</a:t>
-            </a:r>
-            <a:endParaRPr lang="en-US"/>
-          </a:p>
-        </p:txBody>
-      </p:sp>
-      <p:sp>
-        <p:nvSpPr>
-          <p:cNvPr id="4" name="TextBox 3">
-            <a:extLst>
-              <a:ext uri="{FF2B5EF4-FFF2-40B4-BE49-F238E27FC236}">
-                <a16:creationId xmlns:a16="http://schemas.microsoft.com/office/drawing/2014/main" id="{9A0E3988-416C-A0E5-6E47-8D3E1C72D2FE}"/>
-              </a:ext>
-            </a:extLst>
-          </p:cNvPr>
-          <p:cNvSpPr txBox="1"/>
-          <p:nvPr/>
-        </p:nvSpPr>
-        <p:spPr>
-          <a:xfrm>
-            <a:off x="726068" y="2055746"/>
-            <a:ext cx="10745231" cy="1200329"/>
-          </a:xfrm>
-          <a:prstGeom prst="rect">
-            <a:avLst/>
-          </a:prstGeom>
-          <a:noFill/>
-        </p:spPr>
-        <p:txBody>
-          <a:bodyPr rot="0" spcFirstLastPara="0" vertOverflow="overflow" horzOverflow="overflow" vert="horz" wrap="square" lIns="91440" tIns="45720" rIns="91440" bIns="45720" numCol="1" spcCol="0" rtlCol="0" fromWordArt="0" anchor="t" anchorCtr="0" forceAA="0" compatLnSpc="1">
-            <a:prstTxWarp prst="textNoShape">
-              <a:avLst/>
-            </a:prstTxWarp>
-            <a:spAutoFit/>
-          </a:bodyPr>
-          <a:lstStyle/>
-          <a:p>
-            <a:r>
-              <a:rPr lang="en-US" dirty="0">
-                <a:ea typeface="+mn-lt"/>
-                <a:cs typeface="+mn-lt"/>
-              </a:rPr>
-              <a:t>Let l be the number of lines and h be the number of headers, the upper bound can be defined to be O(l * h). So in this project, the time complexity to parse the dataset is O(4 * l) = O(l)</a:t>
-            </a:r>
-            <a:endParaRPr lang="en-US" dirty="0"/>
-          </a:p>
-          <a:p>
-            <a:endParaRPr lang="en-US" dirty="0"/>
-          </a:p>
-          <a:p>
-            <a:pPr algn="l"/>
-            <a:endParaRPr lang="en-US" dirty="0"/>
-          </a:p>
-        </p:txBody>
-      </p:sp>
-    </p:spTree>
-    <p:extLst>
-      <p:ext uri="{BB962C8B-B14F-4D97-AF65-F5344CB8AC3E}">
-        <p14:creationId xmlns:p14="http://schemas.microsoft.com/office/powerpoint/2010/main" val="3670456106"/>
       </p:ext>
     </p:extLst>
   </p:cSld>
